--- a/docs/proposals/presentations/Right-Away-for-managers.pptx
+++ b/docs/proposals/presentations/Right-Away-for-managers.pptx
@@ -2959,7 +2959,7 @@
                 <a:ea typeface="Inter" pitchFamily="34" charset="-122"/>
                 <a:cs typeface="Inter" pitchFamily="34" charset="-120"/>
               </a:rPr>
-              <a:t>today’s link: 5</a:t>
+              <a:t>in the fixed rota · today 5</a:t>
             </a:r>
             <a:endParaRPr lang="en-US" sz="1300" dirty="0"/>
           </a:p>
@@ -3171,7 +3171,7 @@
                 <a:ea typeface="Inter" pitchFamily="34" charset="-122"/>
                 <a:cs typeface="Inter" pitchFamily="34" charset="-120"/>
               </a:rPr>
-              <a:t>Every December rule met, within the contract, with no avoidable fatigue warnings.</a:t>
+              <a:t>Every December rule met — and no avoidable fatigue warnings in the fixed rota.</a:t>
             </a:r>
             <a:endParaRPr lang="en-US" sz="1400" dirty="0"/>
           </a:p>
@@ -5616,7 +5616,7 @@
                 <a:ea typeface="Inter" pitchFamily="34" charset="-122"/>
                 <a:cs typeface="Inter" pitchFamily="34" charset="-120"/>
               </a:rPr>
-              <a:t>Avoidable fatigue warnings</a:t>
+              <a:t>Avoidable fatigue warnings, fixed rota</a:t>
             </a:r>
             <a:endParaRPr lang="en-US" sz="1400" dirty="0"/>
           </a:p>
@@ -6192,7 +6192,7 @@
                 <a:ea typeface="Inter" pitchFamily="34" charset="-122"/>
                 <a:cs typeface="Inter" pitchFamily="34" charset="-120"/>
               </a:rPr>
-              <a:t>The rest and run limits met with room to spare, and no avoidable fatigue warnings.</a:t>
+              <a:t>Rest and run limits met with room to spare; no avoidable fatigue warnings in the fixed rota.</a:t>
             </a:r>
             <a:endParaRPr lang="en-US" sz="1400" dirty="0"/>
           </a:p>
@@ -6998,7 +6998,7 @@
                 <a:ea typeface="Inter" pitchFamily="34" charset="-122"/>
                 <a:cs typeface="Inter" pitchFamily="34" charset="-120"/>
               </a:rPr>
-              <a:t>No avoidable fatigue warnings</a:t>
+              <a:t>No avoidable fatigue warnings in the fixed rota</a:t>
             </a:r>
             <a:endParaRPr lang="en-US" sz="1500" dirty="0"/>
           </a:p>
@@ -8290,7 +8290,7 @@
                 <a:ea typeface="Inter" pitchFamily="34" charset="-122"/>
                 <a:cs typeface="Inter" pitchFamily="34" charset="-120"/>
               </a:rPr>
-              <a:t>Ten on a Sunday, worked as overtime, as today.</a:t>
+              <a:t>Ten on a Sunday — Sunday work stays overtime.</a:t>
             </a:r>
             <a:endParaRPr lang="en-US" sz="1300" dirty="0"/>
           </a:p>

--- a/docs/proposals/presentations/Right-Away-for-managers.pptx
+++ b/docs/proposals/presentations/Right-Away-for-managers.pptx
@@ -2959,7 +2959,7 @@
                 <a:ea typeface="Inter" pitchFamily="34" charset="-122"/>
                 <a:cs typeface="Inter" pitchFamily="34" charset="-120"/>
               </a:rPr>
-              <a:t>in the fixed rota · today 5</a:t>
+              <a:t>in the fixed rota · today 4</a:t>
             </a:r>
             <a:endParaRPr lang="en-US" sz="1300" dirty="0"/>
           </a:p>
@@ -5655,7 +5655,7 @@
                 <a:ea typeface="Inter" pitchFamily="34" charset="-122"/>
                 <a:cs typeface="Inter" pitchFamily="34" charset="-120"/>
               </a:rPr>
-              <a:t>5</a:t>
+              <a:t>4 (up to 5)</a:t>
             </a:r>
             <a:endParaRPr lang="en-US" sz="1600" dirty="0"/>
           </a:p>
@@ -5799,7 +5799,7 @@
                 <a:ea typeface="Inter" pitchFamily="34" charset="-122"/>
                 <a:cs typeface="Inter" pitchFamily="34" charset="-120"/>
               </a:rPr>
-              <a:t>9</a:t>
+              <a:t>7 (up to 9)</a:t>
             </a:r>
             <a:endParaRPr lang="en-US" sz="1600" dirty="0"/>
           </a:p>
@@ -6792,7 +6792,7 @@
                 <a:ea typeface="Inter" pitchFamily="34" charset="-122"/>
                 <a:cs typeface="Inter" pitchFamily="34" charset="-120"/>
               </a:rPr>
-              <a:t>Never more than 6 days in a row — today 9</a:t>
+              <a:t>Never more than 6 days in a row — today 7</a:t>
             </a:r>
             <a:endParaRPr lang="en-US" sz="1500" dirty="0"/>
           </a:p>
@@ -7368,7 +7368,7 @@
                 <a:ea typeface="Inter" pitchFamily="34" charset="-122"/>
                 <a:cs typeface="Inter" pitchFamily="34" charset="-120"/>
               </a:rPr>
-              <a:t>At most 6 days in a row (today 9)</a:t>
+              <a:t>At most 6 days in a row (today 7)</a:t>
             </a:r>
             <a:endParaRPr lang="en-US" sz="1300" dirty="0"/>
           </a:p>

--- a/docs/proposals/presentations/Right-Away-for-managers.pptx
+++ b/docs/proposals/presentations/Right-Away-for-managers.pptx
@@ -4040,7 +4040,7 @@
                 <a:ea typeface="Inter" pitchFamily="34" charset="-122"/>
                 <a:cs typeface="Inter" pitchFamily="34" charset="-120"/>
               </a:rPr>
-              <a:t>Fewest ever on the floor</a:t>
+              <a:t>Fewest rostered on the floor</a:t>
             </a:r>
             <a:endParaRPr lang="en-US" sz="1400" dirty="0"/>
           </a:p>
@@ -7410,7 +7410,7 @@
                 <a:ea typeface="Inter" pitchFamily="34" charset="-122"/>
                 <a:cs typeface="Inter" pitchFamily="34" charset="-120"/>
               </a:rPr>
-              <a:t>Never fewer than 3 on the floor (today 2)</a:t>
+              <a:t>At least 3 rostered on the floor (today 2)</a:t>
             </a:r>
             <a:endParaRPr lang="en-US" sz="1300" dirty="0"/>
           </a:p>

--- a/docs/proposals/presentations/Right-Away-for-managers.pptx
+++ b/docs/proposals/presentations/Right-Away-for-managers.pptx
@@ -1018,7 +1018,7 @@
           <a:p>
             <a:r>
               <a:rPr lang="en-US" dirty="0"/>
-              <a:t>The nine rules are the December 2026 rules, as confirmed: at least four at the open, three to the close, five after 22:00, 10 on a Sunday, the ticket office in fixed pairs, two on the floor at all times, handovers, 8–9 hour Sundays and no more shift times than today. Behind them sit three flexible rules that are aimed for when designing but not scored on: 14 on a Saturday, cover weeks evenly spaced, and weekday closers starting at 15:45. Right Away meets all three.</a:t>
+              <a:t>The nine rules are the December 2026 rules, as confirmed verbally on 29 September 2026: at least four at the open, three to the close, five after 22:00, 10 on a Sunday, the ticket office in fixed pairs, two on the floor at all times, handovers, 8–9 hour Sundays and no more shift times than today. Behind them sit three flexible rules that are aimed for when designing but not scored on: 14 on a Saturday, cover weeks evenly spaced, and weekday closers starting at 15:45. Right Away meets all three.</a:t>
             </a:r>
             <a:endParaRPr lang="en-US" dirty="0"/>
           </a:p>
@@ -1194,7 +1194,7 @@
           <a:p>
             <a:r>
               <a:rPr lang="en-US" dirty="0"/>
-              <a:t>The figure compares, hour by hour, the share of the day’s floor staff on duty with the share of the day’s train service, each train weighted by its length. 0 would be a perfect match. It is a guide to shape, not a staffing requirement — the rules on the previous slide are the requirement. This is what Right Away was built for: with the ticket office rostered in fixed pairs, every other duty was timed so the floor follows the trains. Against today’s link it is about half as far off on weekdays, about a fifth on a Saturday and about two-fifths on a Sunday.</a:t>
+              <a:t>The figure compares, hour by hour, the share of the day’s floor staff on duty with the share of the day’s train service, each train weighted by its length. 0 would be a perfect match. It is a guide to shape, not a staffing requirement — the rules on the previous slide are the requirement. This is what Right Away was built for: with the ticket office rostered in fixed pairs, every other duty was timed so the floor follows the trains. Against today’s link its score is about half on weekdays, about a fifth on a Saturday and about two-fifths on a Sunday; lower is closer.</a:t>
             </a:r>
             <a:endParaRPr lang="en-US" dirty="0"/>
           </a:p>
@@ -1282,7 +1282,7 @@
           <a:p>
             <a:r>
               <a:rPr lang="en-US" dirty="0"/>
-              <a:t>Working weeks average exactly 35 hours Monday to Saturday — 42,000 minutes across the 20 working weeks — so no overtime is needed to balance the Monday-to-Saturday week. Individual weeks range from 24h 30m to 41h 50m; only the average is the contract, as today. Ask the room: are four cover weeks enough for leave and sickness in a 24-person link? Sunday is not contracted, so the ten Sunday duties are worked as rest-day overtime, exactly as today’s eight are. Cover weeks stay at four, which is a slightly smaller share of a longer link: worth deciding deliberately. The two extra Sunday overtime duties a week come from the confirmed Sunday staffing of ten, not from Right Away — any link that meets the rules needs them.</a:t>
+              <a:t>Working weeks average exactly 35 hours Monday to Saturday — 42,000 minutes across the 20 working weeks — so no overtime is needed to balance the Monday-to-Saturday week. Individual weeks range from 24h 30m to 41h 50m; only the average is the contract, as today. Ask the room: are four cover weeks enough for leave and sickness in a 24-person link? Sunday is not contracted, so the ten Sunday duties are worked as rest-day overtime, exactly as today’s eight are. Cover weeks stay at four, which is a slightly smaller share of a longer link: worth deciding deliberately. The two extra Sunday overtime duties a week come from the Sunday staffing of ten, confirmed verbally, not from Right Away — any link that meets the rules needs them.</a:t>
             </a:r>
             <a:endParaRPr lang="en-US" dirty="0"/>
           </a:p>
@@ -1546,7 +1546,7 @@
           <a:p>
             <a:r>
               <a:rPr lang="en-US" dirty="0"/>
-              <a:t>Days at work fall from 219 to 217 a year (Monday to Saturday; Sunday is overtime). The late finishes come from the December staffing — three to the close and five after 22:00, where today’s weekdays have two and four — so any link that meets the rules will have more of them; they average about 20 more a year each, one extra every two or three weeks.</a:t>
+              <a:t>Days at work fall from 219 to 217 a year (Monday to Saturday; Sunday is overtime). The late finishes average about 20 more a year each, one extra every two or three weeks. Only about six or seven of those come from the December staffing — three to the close, where today’s weekdays have two, spread over 24 people; the rest is how this design places its late shifts, so another link meeting the same rules could have fewer.</a:t>
             </a:r>
             <a:endParaRPr lang="en-US" dirty="0"/>
           </a:p>
@@ -2774,7 +2774,7 @@
                 <a:ea typeface="Inter" pitchFamily="34" charset="-122"/>
                 <a:cs typeface="Inter" pitchFamily="34" charset="-120"/>
               </a:rPr>
-              <a:t>contract paid exactly</a:t>
+              <a:t>contract rostered exactly, on average</a:t>
             </a:r>
             <a:endParaRPr lang="en-US" sz="1500" dirty="0"/>
           </a:p>
@@ -5323,7 +5323,7 @@
                 <a:ea typeface="Inter" pitchFamily="34" charset="-122"/>
                 <a:cs typeface="Inter" pitchFamily="34" charset="-120"/>
               </a:rPr>
-              <a:t>Four more people, the contract paid exactly — Sundays still rely on overtime.</a:t>
+              <a:t>Four more people, the contract rostered exactly on average — Sundays still rely on overtime.</a:t>
             </a:r>
             <a:endParaRPr lang="en-US" sz="1400" dirty="0"/>
           </a:p>
@@ -6586,7 +6586,7 @@
                 <a:ea typeface="Inter" pitchFamily="34" charset="-122"/>
                 <a:cs typeface="Inter" pitchFamily="34" charset="-120"/>
               </a:rPr>
-              <a:t>Floor staff follow the trains — about half as far off as today on weekdays</a:t>
+              <a:t>The floor follows the trains more closely — a weekday score about half of today’s</a:t>
             </a:r>
             <a:endParaRPr lang="en-US" sz="1500" dirty="0"/>
           </a:p>
@@ -7864,7 +7864,7 @@
                 <a:ea typeface="Inter" pitchFamily="34" charset="-122"/>
                 <a:cs typeface="Inter" pitchFamily="34" charset="-120"/>
               </a:rPr>
-              <a:t>Three things confirmed, two decisions left</a:t>
+              <a:t>Three things confirmed verbally (29 Sep 2026), two decisions left</a:t>
             </a:r>
             <a:endParaRPr lang="en-US" sz="1500" dirty="0"/>
           </a:p>

--- a/docs/proposals/presentations/Right-Away-for-managers.pptx
+++ b/docs/proposals/presentations/Right-Away-for-managers.pptx
@@ -5323,7 +5323,7 @@
                 <a:ea typeface="Inter" pitchFamily="34" charset="-122"/>
                 <a:cs typeface="Inter" pitchFamily="34" charset="-120"/>
               </a:rPr>
-              <a:t>Four more people, the contract rostered exactly on average — Sundays still rely on overtime.</a:t>
+              <a:t>Four more people, 35 hours a week on average — Sundays still rely on overtime.</a:t>
             </a:r>
             <a:endParaRPr lang="en-US" sz="1400" dirty="0"/>
           </a:p>

--- a/docs/proposals/presentations/Right-Away-for-managers.pptx
+++ b/docs/proposals/presentations/Right-Away-for-managers.pptx
@@ -1018,7 +1018,7 @@
           <a:p>
             <a:r>
               <a:rPr lang="en-US" dirty="0"/>
-              <a:t>The nine rules are the December 2026 rules, as confirmed: at least four at the open, three to the close, five after 22:00, 10 on a Sunday, the ticket office in fixed pairs, two on the floor at all times, handovers, 8–9 hour Sundays and no more shift times than today. Behind them sit three flexible rules that are aimed for when designing but not scored on: 14 on a Saturday, cover weeks evenly spaced, and weekday closers starting at 15:45. Right Away meets all three.</a:t>
+              <a:t>The nine rules are the December 2026 rules, as confirmed verbally on 29 September 2026: at least four at the open, three to the close, five after 22:00, 10 on a Sunday, the ticket office in fixed pairs, two on the floor at all times, handovers, 8–9 hour Sundays and no more shift times than today. Behind them sit three flexible rules that are aimed for when designing but not scored on: 14 on a Saturday, cover weeks evenly spaced, and weekday closers starting at 15:45. Right Away meets all three.</a:t>
             </a:r>
             <a:endParaRPr lang="en-US" dirty="0"/>
           </a:p>
@@ -1194,7 +1194,7 @@
           <a:p>
             <a:r>
               <a:rPr lang="en-US" dirty="0"/>
-              <a:t>The figure compares, hour by hour, the share of the day’s floor staff on duty with the share of the day’s train service, each train weighted by its length. 0 would be a perfect match. It is a guide to shape, not a staffing requirement — the rules on the previous slide are the requirement. This is what Right Away was built for: with the ticket office rostered in fixed pairs, every other duty was timed so the floor follows the trains. Against today’s link it is about half as far off on weekdays, about a fifth on a Saturday and about two-fifths on a Sunday.</a:t>
+              <a:t>The figure compares, hour by hour, the share of the day’s floor staff on duty with the share of the day’s train service, each train weighted by its length. 0 would be a perfect match. It is a guide to shape, not a staffing requirement — the rules on the previous slide are the requirement. This is what Right Away was built for: with the ticket office rostered in fixed pairs, every other duty was timed so the floor follows the trains. Against today’s link its score is about half on weekdays, about a fifth on a Saturday and about two-fifths on a Sunday; lower is closer.</a:t>
             </a:r>
             <a:endParaRPr lang="en-US" dirty="0"/>
           </a:p>
@@ -1282,7 +1282,7 @@
           <a:p>
             <a:r>
               <a:rPr lang="en-US" dirty="0"/>
-              <a:t>Working weeks average exactly 35 hours Monday to Saturday — 42,000 minutes across the 20 working weeks — so no overtime is needed to balance the Monday-to-Saturday week. Individual weeks range from 24h 30m to 41h 50m; only the average is the contract, as today. Ask the room: are four cover weeks enough for leave and sickness in a 24-person link? Sunday is not contracted, so the ten Sunday duties are worked as rest-day overtime, exactly as today’s eight are. Cover weeks stay at four, which is a slightly smaller share of a longer link: worth deciding deliberately. The two extra Sunday overtime duties a week come from the confirmed Sunday staffing of ten, not from Right Away — any link that meets the rules needs them.</a:t>
+              <a:t>Working weeks average exactly 35 hours Monday to Saturday — 42,000 minutes across the 20 working weeks — so no overtime is needed to balance the Monday-to-Saturday week. Individual weeks range from 24h 30m to 41h 50m; only the average is the contract, as today. Ask the room: are four cover weeks enough for leave and sickness in a 24-person link? Sunday is not contracted, so the ten Sunday duties are worked as rest-day overtime, exactly as today’s eight are. Cover weeks stay at four, which is a slightly smaller share of a longer link: worth deciding deliberately. The two extra Sunday overtime duties a week come from the Sunday staffing of ten, confirmed verbally, not from Right Away — any link that meets the rules needs them.</a:t>
             </a:r>
             <a:endParaRPr lang="en-US" dirty="0"/>
           </a:p>
@@ -1546,7 +1546,7 @@
           <a:p>
             <a:r>
               <a:rPr lang="en-US" dirty="0"/>
-              <a:t>Days at work fall from 219 to 217 a year (Monday to Saturday; Sunday is overtime). The late finishes come from the December staffing — three to the close and five after 22:00, where today’s weekdays have two and four — so any link that meets the rules will have more of them; they average about 20 more a year each, one extra every two or three weeks.</a:t>
+              <a:t>Days at work fall from 219 to 217 a year (Monday to Saturday; Sunday is overtime). The late finishes average about 20 more a year each, one extra every two or three weeks. Only about six or seven of those come from the December staffing — three to the close, where today’s weekdays have two, spread over 24 people; the rest is how this design places its late shifts, so another link meeting the same rules could have fewer.</a:t>
             </a:r>
             <a:endParaRPr lang="en-US" dirty="0"/>
           </a:p>
@@ -2774,7 +2774,7 @@
                 <a:ea typeface="Inter" pitchFamily="34" charset="-122"/>
                 <a:cs typeface="Inter" pitchFamily="34" charset="-120"/>
               </a:rPr>
-              <a:t>contract paid exactly</a:t>
+              <a:t>contract rostered exactly, on average</a:t>
             </a:r>
             <a:endParaRPr lang="en-US" sz="1500" dirty="0"/>
           </a:p>
@@ -2959,7 +2959,7 @@
                 <a:ea typeface="Inter" pitchFamily="34" charset="-122"/>
                 <a:cs typeface="Inter" pitchFamily="34" charset="-120"/>
               </a:rPr>
-              <a:t>in the fixed rota · today 5</a:t>
+              <a:t>in the fixed rota · today 4</a:t>
             </a:r>
             <a:endParaRPr lang="en-US" sz="1300" dirty="0"/>
           </a:p>
@@ -4040,7 +4040,7 @@
                 <a:ea typeface="Inter" pitchFamily="34" charset="-122"/>
                 <a:cs typeface="Inter" pitchFamily="34" charset="-120"/>
               </a:rPr>
-              <a:t>Fewest ever on the floor</a:t>
+              <a:t>Fewest rostered on the floor</a:t>
             </a:r>
             <a:endParaRPr lang="en-US" sz="1400" dirty="0"/>
           </a:p>
@@ -5323,7 +5323,7 @@
                 <a:ea typeface="Inter" pitchFamily="34" charset="-122"/>
                 <a:cs typeface="Inter" pitchFamily="34" charset="-120"/>
               </a:rPr>
-              <a:t>Four more people, the contract paid exactly — Sundays still rely on overtime.</a:t>
+              <a:t>Four more people, 35 hours a week on average — Sundays still rely on overtime.</a:t>
             </a:r>
             <a:endParaRPr lang="en-US" sz="1400" dirty="0"/>
           </a:p>
@@ -5655,7 +5655,7 @@
                 <a:ea typeface="Inter" pitchFamily="34" charset="-122"/>
                 <a:cs typeface="Inter" pitchFamily="34" charset="-120"/>
               </a:rPr>
-              <a:t>5</a:t>
+              <a:t>4 (up to 5)</a:t>
             </a:r>
             <a:endParaRPr lang="en-US" sz="1600" dirty="0"/>
           </a:p>
@@ -5799,7 +5799,7 @@
                 <a:ea typeface="Inter" pitchFamily="34" charset="-122"/>
                 <a:cs typeface="Inter" pitchFamily="34" charset="-120"/>
               </a:rPr>
-              <a:t>9</a:t>
+              <a:t>7 (up to 9)</a:t>
             </a:r>
             <a:endParaRPr lang="en-US" sz="1600" dirty="0"/>
           </a:p>
@@ -6586,7 +6586,7 @@
                 <a:ea typeface="Inter" pitchFamily="34" charset="-122"/>
                 <a:cs typeface="Inter" pitchFamily="34" charset="-120"/>
               </a:rPr>
-              <a:t>Floor staff follow the trains — about half as far off as today on weekdays</a:t>
+              <a:t>The floor follows the trains more closely — a weekday score about half of today’s</a:t>
             </a:r>
             <a:endParaRPr lang="en-US" sz="1500" dirty="0"/>
           </a:p>
@@ -6792,7 +6792,7 @@
                 <a:ea typeface="Inter" pitchFamily="34" charset="-122"/>
                 <a:cs typeface="Inter" pitchFamily="34" charset="-120"/>
               </a:rPr>
-              <a:t>Never more than 6 days in a row — today 9</a:t>
+              <a:t>Never more than 6 days in a row — today 7</a:t>
             </a:r>
             <a:endParaRPr lang="en-US" sz="1500" dirty="0"/>
           </a:p>
@@ -7368,7 +7368,7 @@
                 <a:ea typeface="Inter" pitchFamily="34" charset="-122"/>
                 <a:cs typeface="Inter" pitchFamily="34" charset="-120"/>
               </a:rPr>
-              <a:t>At most 6 days in a row (today 9)</a:t>
+              <a:t>At most 6 days in a row (today 7)</a:t>
             </a:r>
             <a:endParaRPr lang="en-US" sz="1300" dirty="0"/>
           </a:p>
@@ -7410,7 +7410,7 @@
                 <a:ea typeface="Inter" pitchFamily="34" charset="-122"/>
                 <a:cs typeface="Inter" pitchFamily="34" charset="-120"/>
               </a:rPr>
-              <a:t>Never fewer than 3 on the floor (today 2)</a:t>
+              <a:t>At least 3 rostered on the floor (today 2)</a:t>
             </a:r>
             <a:endParaRPr lang="en-US" sz="1300" dirty="0"/>
           </a:p>
@@ -7864,7 +7864,7 @@
                 <a:ea typeface="Inter" pitchFamily="34" charset="-122"/>
                 <a:cs typeface="Inter" pitchFamily="34" charset="-120"/>
               </a:rPr>
-              <a:t>Three things confirmed, two decisions left</a:t>
+              <a:t>Three things confirmed verbally (29 Sep 2026), two decisions left</a:t>
             </a:r>
             <a:endParaRPr lang="en-US" sz="1500" dirty="0"/>
           </a:p>
